--- a/msds_ppt_generator/templates/handling_template.pptx
+++ b/msds_ppt_generator/templates/handling_template.pptx
@@ -5369,30 +5369,30 @@
                         <a:defRPr/>
                       </a:pPr>
                       <a:r>
-                        <a:rPr lang="en-US" altLang="ko-KR" sz="1100" b="1" dirty="0" smtClean="0">
-                          <a:latin typeface="굴림" panose="020B0600000101010101" pitchFamily="50" charset="-127"/>
-                          <a:ea typeface="굴림" panose="020B0600000101010101" pitchFamily="50" charset="-127"/>
+                        <a:rPr lang="en-US" altLang="ko-KR" sz="1900" b="1" dirty="0" smtClean="0">
+                          <a:latin typeface="돋움" panose="020B0600000101010101" pitchFamily="50" charset="-127"/>
+                          <a:ea typeface="돋움" panose="020B0600000101010101" pitchFamily="50" charset="-127"/>
                         </a:rPr>
                         <a:t>※ </a:t>
                       </a:r>
                       <a:r>
-                        <a:rPr lang="ko-KR" altLang="en-US" sz="1100" b="1" dirty="0" smtClean="0">
-                          <a:latin typeface="굴림" panose="020B0600000101010101" pitchFamily="50" charset="-127"/>
-                          <a:ea typeface="굴림" panose="020B0600000101010101" pitchFamily="50" charset="-127"/>
+                        <a:rPr lang="ko-KR" altLang="en-US" sz="1900" b="1" dirty="0" smtClean="0">
+                          <a:latin typeface="돋움" panose="020B0600000101010101" pitchFamily="50" charset="-127"/>
+                          <a:ea typeface="돋움" panose="020B0600000101010101" pitchFamily="50" charset="-127"/>
                         </a:rPr>
                         <a:t>기타 자세한 내용은 물질안전보건자료</a:t>
                       </a:r>
                       <a:r>
-                        <a:rPr lang="en-US" altLang="ko-KR" sz="1100" b="1" dirty="0" smtClean="0">
-                          <a:latin typeface="굴림" panose="020B0600000101010101" pitchFamily="50" charset="-127"/>
-                          <a:ea typeface="굴림" panose="020B0600000101010101" pitchFamily="50" charset="-127"/>
+                        <a:rPr lang="en-US" altLang="ko-KR" sz="1900" b="1" dirty="0" smtClean="0">
+                          <a:latin typeface="돋움" panose="020B0600000101010101" pitchFamily="50" charset="-127"/>
+                          <a:ea typeface="돋움" panose="020B0600000101010101" pitchFamily="50" charset="-127"/>
                         </a:rPr>
                         <a:t>(MSDS) </a:t>
                       </a:r>
                       <a:r>
-                        <a:rPr lang="ko-KR" altLang="en-US" sz="1100" b="1" dirty="0" smtClean="0">
-                          <a:latin typeface="굴림" panose="020B0600000101010101" pitchFamily="50" charset="-127"/>
-                          <a:ea typeface="굴림" panose="020B0600000101010101" pitchFamily="50" charset="-127"/>
+                        <a:rPr lang="ko-KR" altLang="en-US" sz="1900" b="1" dirty="0" smtClean="0">
+                          <a:latin typeface="돋움" panose="020B0600000101010101" pitchFamily="50" charset="-127"/>
+                          <a:ea typeface="돋움" panose="020B0600000101010101" pitchFamily="50" charset="-127"/>
                         </a:rPr>
                         <a:t>참고</a:t>
                       </a:r>
